--- a/06_Presentacion/Presentacion_Memoria_SISFV_Argelia_Cauca.pptx
+++ b/06_Presentacion/Presentacion_Memoria_SISFV_Argelia_Cauca.pptx
@@ -9858,9 +9858,18 @@
                 <a:latin typeface="Courier New" pitchFamily="34" charset="0"/>
                 <a:ea typeface="Courier New" pitchFamily="34" charset="-122"/>
                 <a:cs typeface="Courier New" pitchFamily="34" charset="-120"/>
+                <a:hlinkClick r:id="rId3"/>
               </a:rPr>
               <a:t>Repositorio_SISFV_Argelia_Cauca:</a:t>
             </a:r>
+            <a:endParaRPr lang="es-CO" sz="1600" noProof="0" dirty="0">
+              <a:solidFill>
+                <a:srgbClr val="0F172A"/>
+              </a:solidFill>
+              <a:latin typeface="Courier New" pitchFamily="34" charset="0"/>
+              <a:ea typeface="Courier New" pitchFamily="34" charset="-122"/>
+              <a:cs typeface="Courier New" pitchFamily="34" charset="-120"/>
+            </a:endParaRPr>
           </a:p>
           <a:p>
             <a:pPr marL="0" indent="0">
@@ -10105,6 +10114,7 @@
       <p:pic>
         <p:nvPicPr>
           <p:cNvPr id="20" name="Imagen 19">
+            <a:hlinkClick r:id="rId3"/>
             <a:extLst>
               <a:ext uri="{FF2B5EF4-FFF2-40B4-BE49-F238E27FC236}">
                 <a16:creationId xmlns:a16="http://schemas.microsoft.com/office/drawing/2014/main" id="{569B86F7-CBF8-2DD1-D444-349D616CD9A7}"/>
@@ -10117,7 +10127,7 @@
           <p:nvPr/>
         </p:nvPicPr>
         <p:blipFill>
-          <a:blip r:embed="rId3"/>
+          <a:blip r:embed="rId4"/>
           <a:stretch>
             <a:fillRect/>
           </a:stretch>
@@ -10126,6 +10136,43 @@
           <a:xfrm>
             <a:off x="6135573" y="2194560"/>
             <a:ext cx="5096307" cy="3522384"/>
+          </a:xfrm>
+          <a:prstGeom prst="rect">
+            <a:avLst/>
+          </a:prstGeom>
+        </p:spPr>
+      </p:pic>
+      <p:pic>
+        <p:nvPicPr>
+          <p:cNvPr id="18" name="Gráfico 17" descr="Gesto de doble toque con relleno sólido">
+            <a:hlinkClick r:id="rId3"/>
+            <a:extLst>
+              <a:ext uri="{FF2B5EF4-FFF2-40B4-BE49-F238E27FC236}">
+                <a16:creationId xmlns:a16="http://schemas.microsoft.com/office/drawing/2014/main" id="{B950237E-27F4-3727-64FE-A49CE69AAF07}"/>
+              </a:ext>
+            </a:extLst>
+          </p:cNvPr>
+          <p:cNvPicPr>
+            <a:picLocks noChangeAspect="1"/>
+          </p:cNvPicPr>
+          <p:nvPr/>
+        </p:nvPicPr>
+        <p:blipFill>
+          <a:blip>
+            <a:extLst>
+              <a:ext uri="{96DAC541-7B7A-43D3-8B79-37D633B846F1}">
+                <asvg:svgBlip xmlns:asvg="http://schemas.microsoft.com/office/drawing/2016/SVG/main" r:embed="rId5"/>
+              </a:ext>
+            </a:extLst>
+          </a:blip>
+          <a:stretch>
+            <a:fillRect/>
+          </a:stretch>
+        </p:blipFill>
+        <p:spPr>
+          <a:xfrm>
+            <a:off x="10172548" y="4658958"/>
+            <a:ext cx="914400" cy="914400"/>
           </a:xfrm>
           <a:prstGeom prst="rect">
             <a:avLst/>
